--- a/proposal/PharmaColdOps-Proposal-Presentation.pptx
+++ b/proposal/PharmaColdOps-Proposal-Presentation.pptx
@@ -4826,7 +4826,7 @@
                 </a:solidFill>
                 <a:latin typeface="Calibri"/>
               </a:rPr>
-              <a:t>Risk prediction — Accuracy, F1, AUC, PR-AUC, warning lead time</a:t>
+              <a:t>Risk prediction — accuracy, F1, ROC-AUC, PR-AUC and the majority-class baseline</a:t>
             </a:r>
           </a:p>
           <a:p>
@@ -4898,7 +4898,7 @@
                 </a:solidFill>
                 <a:latin typeface="Calibri"/>
               </a:rPr>
-              <a:t>Optimisation — on-time rate, cost &amp; waste reduction vs. greedy and CP-SAT baselines</a:t>
+              <a:t>Optimisation — on-time rate, cost &amp; waste reduction vs. the greedy baseline</a:t>
             </a:r>
           </a:p>
           <a:p>
@@ -6782,7 +6782,7 @@
                 </a:solidFill>
                 <a:latin typeface="Calibri"/>
               </a:rPr>
-              <a:t>On an excursion: issue an explainable disposition — release / quarantine / retest / scrap / reshipment</a:t>
+              <a:t>On an excursion: issue an explainable disposition — release / quarantine / retest / scrap, plus a derived reshipment flag</a:t>
             </a:r>
           </a:p>
           <a:p>
@@ -7331,7 +7331,7 @@
                 </a:solidFill>
                 <a:latin typeface="Calibri"/>
               </a:rPr>
-              <a:t>Detect excursion  ·  compute MKT  ·  predict 30–60 min risk</a:t>
+              <a:t>Detect excursion  ·  compute MKT  ·  classify transport-level silent-failure risk</a:t>
             </a:r>
           </a:p>
         </p:txBody>
@@ -7485,7 +7485,7 @@
                 </a:solidFill>
                 <a:latin typeface="Calibri"/>
               </a:rPr>
-              <a:t>Rule engine → disposition  (release / quarantine / retest / scrap / reshipment)</a:t>
+              <a:t>Rule engine → disposition  (release / quarantine / retest / scrap + derived reshipment flag)</a:t>
             </a:r>
           </a:p>
         </p:txBody>
@@ -8357,7 +8357,7 @@
                 </a:solidFill>
                 <a:latin typeface="Calibri"/>
               </a:rPr>
-              <a:t>Decision automation — rule engine for release / quarantine / retest / scrap / reshipment</a:t>
+              <a:t>Decision automation — rule engine for release / quarantine / retest / scrap, plus a derived reshipment flag</a:t>
             </a:r>
           </a:p>
           <a:p>
@@ -8381,7 +8381,7 @@
                 </a:solidFill>
                 <a:latin typeface="Calibri"/>
               </a:rPr>
-              <a:t>Resource optimisation — genetic algorithm / OR-Tools CP-SAT for cold-chain VRPTW</a:t>
+              <a:t>Resource optimisation — OR-Tools Routing Solver for cold-chain VRPTW</a:t>
             </a:r>
           </a:p>
           <a:p>
